--- a/proposal/shield-ai-proposal.pptx
+++ b/proposal/shield-ai-proposal.pptx
@@ -2430,7 +2430,7 @@
                 <a:ea typeface="Calibri" pitchFamily="34" charset="-122"/>
                 <a:cs typeface="Calibri" pitchFamily="34" charset="-120"/>
               </a:rPr>
-              <a:t>Investment: $2–4M</a:t>
+              <a:t>Investment: $1.5–3M</a:t>
             </a:r>
             <a:endParaRPr lang="en-US" sz="1300" dirty="0"/>
           </a:p>
@@ -2450,7 +2450,7 @@
                 <a:ea typeface="Calibri" pitchFamily="34" charset="-122"/>
                 <a:cs typeface="Calibri" pitchFamily="34" charset="-120"/>
               </a:rPr>
-              <a:t>Conservative Return: $163M ARR  |  Moderate: $653M ARR</a:t>
+              <a:t>Conservative: $163M ARR  |  Moderate: $653M ARR  |  Validated before build</a:t>
             </a:r>
             <a:endParaRPr lang="en-US" sz="1300" dirty="0"/>
           </a:p>
@@ -2602,7 +2602,7 @@
                 <a:ea typeface="Calibri" pitchFamily="34" charset="-122"/>
                 <a:cs typeface="Calibri" pitchFamily="34" charset="-120"/>
               </a:rPr>
-              <a:t>Shield AI transforms DuckDuckGo from a $100M privacy search company into a $1B+ AI platform company by adding an enterprise-grade AI execution layer on top of DDG's existing privacy infrastructure.</a:t>
+              <a:t>Shield AI transforms DuckDuckGo from a $100M privacy search company into a $1B+ AI platform company — using a capital-efficient buy-and-self-host strategy that reduces the build to $1.5–3M with a $15–30K validation sprint to derisk before engineering begins.</a:t>
             </a:r>
             <a:endParaRPr lang="en-US" sz="1500" dirty="0"/>
           </a:p>
@@ -4011,7 +4011,7 @@
                 <a:ea typeface="Calibri" pitchFamily="34" charset="-122"/>
                 <a:cs typeface="Calibri" pitchFamily="34" charset="-120"/>
               </a:rPr>
-              <a:t>100+ models with intelligent auto-routing</a:t>
+              <a:t>100+ models via LiteLLM (self-hosted) + custom auto-route intelligence</a:t>
             </a:r>
             <a:endParaRPr lang="en-US" sz="1200" dirty="0"/>
           </a:p>
@@ -4214,7 +4214,7 @@
                 <a:ea typeface="Calibri" pitchFamily="34" charset="-122"/>
                 <a:cs typeface="Calibri" pitchFamily="34" charset="-120"/>
               </a:rPr>
-              <a:t>Autonomous multi-step workflows</a:t>
+              <a:t>Autonomous workflows via LangGraph (self-hosted) + 6 custom agents</a:t>
             </a:r>
             <a:endParaRPr lang="en-US" sz="1200" dirty="0"/>
           </a:p>
@@ -4417,7 +4417,7 @@
                 <a:ea typeface="Calibri" pitchFamily="34" charset="-122"/>
                 <a:cs typeface="Calibri" pitchFamily="34" charset="-120"/>
               </a:rPr>
-              <a:t>Ephemeral container execution</a:t>
+              <a:t>Ephemeral Firecracker microVMs via E2B + zero-persistence policy</a:t>
             </a:r>
             <a:endParaRPr lang="en-US" sz="1200" dirty="0"/>
           </a:p>
@@ -4620,7 +4620,7 @@
                 <a:ea typeface="Calibri" pitchFamily="34" charset="-122"/>
                 <a:cs typeface="Calibri" pitchFamily="34" charset="-120"/>
               </a:rPr>
-              <a:t>Reports, decks, and summaries</a:t>
+              <a:t>Reports, decks, summaries via open-source rendering libraries</a:t>
             </a:r>
             <a:endParaRPr lang="en-US" sz="1200" dirty="0"/>
           </a:p>
@@ -4823,7 +4823,7 @@
                 <a:ea typeface="Calibri" pitchFamily="34" charset="-122"/>
                 <a:cs typeface="Calibri" pitchFamily="34" charset="-120"/>
               </a:rPr>
-              <a:t>Slack, Drive, GitHub, Jira + 50 more</a:t>
+              <a:t>50+ tools via Nango (self-hosted) + Prisma AIRS security layer</a:t>
             </a:r>
             <a:endParaRPr lang="en-US" sz="1200" dirty="0"/>
           </a:p>
@@ -9982,7 +9982,7 @@
                 <a:ea typeface="Trebuchet MS" pitchFamily="34" charset="-122"/>
                 <a:cs typeface="Trebuchet MS" pitchFamily="34" charset="-120"/>
               </a:rPr>
-              <a:t>$2–4M</a:t>
+              <a:t>$1.5–3M</a:t>
             </a:r>
             <a:endParaRPr lang="en-US" sz="4000" dirty="0"/>
           </a:p>
@@ -10021,7 +10021,7 @@
                 <a:ea typeface="Calibri" pitchFamily="34" charset="-122"/>
                 <a:cs typeface="Calibri" pitchFamily="34" charset="-120"/>
               </a:rPr>
-              <a:t>12-person team, 6 months</a:t>
+              <a:t>10-person team, 6 months (70% bought)</a:t>
             </a:r>
             <a:endParaRPr lang="en-US" sz="1300" dirty="0"/>
           </a:p>
@@ -10067,7 +10067,7 @@
                 <a:ea typeface="Calibri" pitchFamily="34" charset="-122"/>
                 <a:cs typeface="Calibri" pitchFamily="34" charset="-120"/>
               </a:rPr>
-              <a:t>4 Backend Engineers (routing, agents, containers)</a:t>
+              <a:t>3 Backend (auto-route, agents, integration wiring)</a:t>
             </a:r>
             <a:endParaRPr lang="en-US" sz="1000" dirty="0"/>
           </a:p>
@@ -10091,7 +10091,7 @@
                 <a:ea typeface="Calibri" pitchFamily="34" charset="-122"/>
                 <a:cs typeface="Calibri" pitchFamily="34" charset="-120"/>
               </a:rPr>
-              <a:t>3 Frontend Engineers (web, mobile, extension)</a:t>
+              <a:t>3 Frontend (web, mobile, browser extension)</a:t>
             </a:r>
             <a:endParaRPr lang="en-US" sz="1000" dirty="0"/>
           </a:p>
@@ -10115,7 +10115,7 @@
                 <a:ea typeface="Calibri" pitchFamily="34" charset="-122"/>
                 <a:cs typeface="Calibri" pitchFamily="34" charset="-120"/>
               </a:rPr>
-              <a:t>2 Infra Engineers (ephemeral compute, encryption)</a:t>
+              <a:t>2 DevOps (self-hosted stack, ephemeral compute)</a:t>
             </a:r>
             <a:endParaRPr lang="en-US" sz="1000" dirty="0"/>
           </a:p>
@@ -10163,7 +10163,7 @@
                 <a:ea typeface="Calibri" pitchFamily="34" charset="-122"/>
                 <a:cs typeface="Calibri" pitchFamily="34" charset="-120"/>
               </a:rPr>
-              <a:t>1 Product Manager + 1 Designer</a:t>
+              <a:t>1 Product Designer</a:t>
             </a:r>
             <a:endParaRPr lang="en-US" sz="1000" dirty="0"/>
           </a:p>
@@ -10275,7 +10275,7 @@
                 <a:ea typeface="Trebuchet MS" pitchFamily="34" charset="-122"/>
                 <a:cs typeface="Trebuchet MS" pitchFamily="34" charset="-120"/>
               </a:rPr>
-              <a:t>DDG Already Has</a:t>
+              <a:t>Bought &amp; Self-Hosted</a:t>
             </a:r>
             <a:endParaRPr lang="en-US" sz="1600" dirty="0"/>
           </a:p>
@@ -10289,8 +10289,8 @@
         </p:nvSpPr>
         <p:spPr>
           <a:xfrm>
-            <a:off x="5029200" y="2011680"/>
-            <a:ext cx="3200400" cy="2011680"/>
+            <a:off x="5029200" y="1920240"/>
+            <a:ext cx="3200400" cy="2286000"/>
           </a:xfrm>
           <a:prstGeom prst="rect">
             <a:avLst/>
@@ -10304,16 +10304,16 @@
           <a:p>
             <a:pPr marL="342900" indent="-342900">
               <a:lnSpc>
-                <a:spcPct val="150000"/>
+                <a:spcPct val="130000"/>
               </a:lnSpc>
               <a:spcAft>
-                <a:spcPts val="600"/>
+                <a:spcPts val="300"/>
               </a:spcAft>
               <a:buSzPct val="100000"/>
               <a:buChar char="•"/>
             </a:pPr>
             <a:r>
-              <a:rPr lang="en-US" sz="1100" dirty="0">
+              <a:rPr lang="en-US" sz="1000" dirty="0">
                 <a:solidFill>
                   <a:srgbClr val="94A3B8"/>
                 </a:solidFill>
@@ -10321,23 +10321,23 @@
                 <a:ea typeface="Calibri" pitchFamily="34" charset="-122"/>
                 <a:cs typeface="Calibri" pitchFamily="34" charset="-120"/>
               </a:rPr>
-              <a:t>Anonymization relay infrastructure</a:t>
-            </a:r>
-            <a:endParaRPr lang="en-US" sz="1100" dirty="0"/>
+              <a:t>LiteLLM — model routing (open source)</a:t>
+            </a:r>
+            <a:endParaRPr lang="en-US" sz="1000" dirty="0"/>
           </a:p>
           <a:p>
             <a:pPr marL="342900" indent="-342900">
               <a:lnSpc>
-                <a:spcPct val="150000"/>
+                <a:spcPct val="130000"/>
               </a:lnSpc>
               <a:spcAft>
-                <a:spcPts val="600"/>
+                <a:spcPts val="300"/>
               </a:spcAft>
               <a:buSzPct val="100000"/>
               <a:buChar char="•"/>
             </a:pPr>
             <a:r>
-              <a:rPr lang="en-US" sz="1100" dirty="0">
+              <a:rPr lang="en-US" sz="1000" dirty="0">
                 <a:solidFill>
                   <a:srgbClr val="94A3B8"/>
                 </a:solidFill>
@@ -10345,23 +10345,23 @@
                 <a:ea typeface="Calibri" pitchFamily="34" charset="-122"/>
                 <a:cs typeface="Calibri" pitchFamily="34" charset="-120"/>
               </a:rPr>
-              <a:t>PII-stripping pipeline (in production)</a:t>
-            </a:r>
-            <a:endParaRPr lang="en-US" sz="1100" dirty="0"/>
+              <a:t>LangGraph — agent orchestration (open source)</a:t>
+            </a:r>
+            <a:endParaRPr lang="en-US" sz="1000" dirty="0"/>
           </a:p>
           <a:p>
             <a:pPr marL="342900" indent="-342900">
               <a:lnSpc>
-                <a:spcPct val="150000"/>
+                <a:spcPct val="130000"/>
               </a:lnSpc>
               <a:spcAft>
-                <a:spcPts val="600"/>
+                <a:spcPts val="300"/>
               </a:spcAft>
               <a:buSzPct val="100000"/>
               <a:buChar char="•"/>
             </a:pPr>
             <a:r>
-              <a:rPr lang="en-US" sz="1100" dirty="0">
+              <a:rPr lang="en-US" sz="1000" dirty="0">
                 <a:solidFill>
                   <a:srgbClr val="94A3B8"/>
                 </a:solidFill>
@@ -10369,23 +10369,23 @@
                 <a:ea typeface="Calibri" pitchFamily="34" charset="-122"/>
                 <a:cs typeface="Calibri" pitchFamily="34" charset="-120"/>
               </a:rPr>
-              <a:t>Subscription billing system</a:t>
-            </a:r>
-            <a:endParaRPr lang="en-US" sz="1100" dirty="0"/>
+              <a:t>E2B / Firecracker — code sandbox</a:t>
+            </a:r>
+            <a:endParaRPr lang="en-US" sz="1000" dirty="0"/>
           </a:p>
           <a:p>
             <a:pPr marL="342900" indent="-342900">
               <a:lnSpc>
-                <a:spcPct val="150000"/>
+                <a:spcPct val="130000"/>
               </a:lnSpc>
               <a:spcAft>
-                <a:spcPts val="600"/>
+                <a:spcPts val="300"/>
               </a:spcAft>
               <a:buSzPct val="100000"/>
               <a:buChar char="•"/>
             </a:pPr>
             <a:r>
-              <a:rPr lang="en-US" sz="1100" dirty="0">
+              <a:rPr lang="en-US" sz="1000" dirty="0">
                 <a:solidFill>
                   <a:srgbClr val="94A3B8"/>
                 </a:solidFill>
@@ -10393,23 +10393,23 @@
                 <a:ea typeface="Calibri" pitchFamily="34" charset="-122"/>
                 <a:cs typeface="Calibri" pitchFamily="34" charset="-120"/>
               </a:rPr>
-              <a:t>Browser + mobile distribution</a:t>
-            </a:r>
-            <a:endParaRPr lang="en-US" sz="1100" dirty="0"/>
+              <a:t>Nango — 250+ integrations (open source)</a:t>
+            </a:r>
+            <a:endParaRPr lang="en-US" sz="1000" dirty="0"/>
           </a:p>
           <a:p>
             <a:pPr marL="342900" indent="-342900">
               <a:lnSpc>
-                <a:spcPct val="150000"/>
+                <a:spcPct val="130000"/>
               </a:lnSpc>
               <a:spcAft>
-                <a:spcPts val="600"/>
+                <a:spcPts val="300"/>
               </a:spcAft>
               <a:buSzPct val="100000"/>
               <a:buChar char="•"/>
             </a:pPr>
             <a:r>
-              <a:rPr lang="en-US" sz="1100" dirty="0">
+              <a:rPr lang="en-US" sz="1000" dirty="0">
                 <a:solidFill>
                   <a:srgbClr val="94A3B8"/>
                 </a:solidFill>
@@ -10417,23 +10417,23 @@
                 <a:ea typeface="Calibri" pitchFamily="34" charset="-122"/>
                 <a:cs typeface="Calibri" pitchFamily="34" charset="-120"/>
               </a:rPr>
-              <a:t>Model provider contracts</a:t>
-            </a:r>
-            <a:endParaRPr lang="en-US" sz="1100" dirty="0"/>
+              <a:t>Langfuse — observability (open source)</a:t>
+            </a:r>
+            <a:endParaRPr lang="en-US" sz="1000" dirty="0"/>
           </a:p>
           <a:p>
             <a:pPr marL="342900" indent="-342900">
               <a:lnSpc>
-                <a:spcPct val="150000"/>
+                <a:spcPct val="130000"/>
               </a:lnSpc>
               <a:spcAft>
-                <a:spcPts val="600"/>
+                <a:spcPts val="300"/>
               </a:spcAft>
               <a:buSzPct val="100000"/>
               <a:buChar char="•"/>
             </a:pPr>
             <a:r>
-              <a:rPr lang="en-US" sz="1100" dirty="0">
+              <a:rPr lang="en-US" sz="1000" dirty="0">
                 <a:solidFill>
                   <a:srgbClr val="94A3B8"/>
                 </a:solidFill>
@@ -10441,9 +10441,57 @@
                 <a:ea typeface="Calibri" pitchFamily="34" charset="-122"/>
                 <a:cs typeface="Calibri" pitchFamily="34" charset="-120"/>
               </a:rPr>
-              <a:t>Compliance team + legal framework</a:t>
-            </a:r>
-            <a:endParaRPr lang="en-US" sz="1100" dirty="0"/>
+              <a:t>Qdrant — vector store (open source)</a:t>
+            </a:r>
+            <a:endParaRPr lang="en-US" sz="1000" dirty="0"/>
+          </a:p>
+          <a:p>
+            <a:pPr marL="342900" indent="-342900">
+              <a:lnSpc>
+                <a:spcPct val="130000"/>
+              </a:lnSpc>
+              <a:spcAft>
+                <a:spcPts val="300"/>
+              </a:spcAft>
+              <a:buSzPct val="100000"/>
+              <a:buChar char="•"/>
+            </a:pPr>
+            <a:r>
+              <a:rPr lang="en-US" sz="1000" dirty="0">
+                <a:solidFill>
+                  <a:srgbClr val="94A3B8"/>
+                </a:solidFill>
+                <a:latin typeface="Calibri" pitchFamily="34" charset="0"/>
+                <a:ea typeface="Calibri" pitchFamily="34" charset="-122"/>
+                <a:cs typeface="Calibri" pitchFamily="34" charset="-120"/>
+              </a:rPr>
+              <a:t>Guardrails AI → Prisma AIRS (security)</a:t>
+            </a:r>
+            <a:endParaRPr lang="en-US" sz="1000" dirty="0"/>
+          </a:p>
+          <a:p>
+            <a:pPr marL="342900" indent="-342900">
+              <a:lnSpc>
+                <a:spcPct val="130000"/>
+              </a:lnSpc>
+              <a:spcAft>
+                <a:spcPts val="300"/>
+              </a:spcAft>
+              <a:buSzPct val="100000"/>
+              <a:buChar char="•"/>
+            </a:pPr>
+            <a:r>
+              <a:rPr lang="en-US" sz="1000" dirty="0">
+                <a:solidFill>
+                  <a:srgbClr val="94A3B8"/>
+                </a:solidFill>
+                <a:latin typeface="Calibri" pitchFamily="34" charset="0"/>
+                <a:ea typeface="Calibri" pitchFamily="34" charset="-122"/>
+                <a:cs typeface="Calibri" pitchFamily="34" charset="-120"/>
+              </a:rPr>
+              <a:t>WorkOS + Vanta (auth + compliance)</a:t>
+            </a:r>
+            <a:endParaRPr lang="en-US" sz="1000" dirty="0"/>
           </a:p>
         </p:txBody>
       </p:sp>
@@ -10455,8 +10503,8 @@
         </p:nvSpPr>
         <p:spPr>
           <a:xfrm>
-            <a:off x="5029200" y="3931920"/>
-            <a:ext cx="3200400" cy="548640"/>
+            <a:off x="5029200" y="4114800"/>
+            <a:ext cx="3200400" cy="411480"/>
           </a:xfrm>
           <a:prstGeom prst="rect">
             <a:avLst/>
@@ -10475,7 +10523,7 @@
               <a:buNone/>
             </a:pPr>
             <a:r>
-              <a:rPr lang="en-US" sz="1000" i="1" dirty="0">
+              <a:rPr lang="en-US" sz="900" i="1" dirty="0">
                 <a:solidFill>
                   <a:srgbClr val="E8714F"/>
                 </a:solidFill>
@@ -10483,9 +10531,9 @@
                 <a:ea typeface="Calibri" pitchFamily="34" charset="-122"/>
                 <a:cs typeface="Calibri" pitchFamily="34" charset="-120"/>
               </a:rPr>
-              <a:t>Abacus AI raised $113M to build their platform from scratch. Shield AI leverages existing DDG infrastructure at 2–3% of that cost.</a:t>
-            </a:r>
-            <a:endParaRPr lang="en-US" sz="1000" dirty="0"/>
+              <a:t>Abacus raised $113M to build from scratch. Shield AI buys 70% open source, self-hosts for privacy. Vendor cost: ~$12–25K/mo.</a:t>
+            </a:r>
+            <a:endParaRPr lang="en-US" sz="900" dirty="0"/>
           </a:p>
         </p:txBody>
       </p:sp>
@@ -10778,7 +10826,7 @@
                 <a:ea typeface="Calibri" pitchFamily="34" charset="-122"/>
                 <a:cs typeface="Calibri" pitchFamily="34" charset="-120"/>
               </a:rPr>
-              <a:t>Ship Teams beta to 1K users. Multi-model router, basic agents, code sandbox, privacy dashboard.</a:t>
+              <a:t>Deploy LiteLLM + LangGraph + Guardrails AI + Langfuse + Qdrant. Ship beta to 1K users. Auto-route + 2 agents. ~$6.5K/mo vendor.</a:t>
             </a:r>
             <a:endParaRPr lang="en-US" sz="1100" dirty="0"/>
           </a:p>
@@ -11002,7 +11050,7 @@
                 <a:ea typeface="Calibri" pitchFamily="34" charset="-122"/>
                 <a:cs typeface="Calibri" pitchFamily="34" charset="-120"/>
               </a:rPr>
-              <a:t>Expand to 10K users. Full agent suite, 50+ integrations, team workspaces, SSO/SAML.</a:t>
+              <a:t>Add E2B sandbox, Nango integrations, WorkOS auth. 10K users. Full agent suite + team workspaces. ~$12K/mo vendor.</a:t>
             </a:r>
             <a:endParaRPr lang="en-US" sz="1100" dirty="0"/>
           </a:p>
@@ -11226,7 +11274,7 @@
                 <a:ea typeface="Calibri" pitchFamily="34" charset="-122"/>
                 <a:cs typeface="Calibri" pitchFamily="34" charset="-120"/>
               </a:rPr>
-              <a:t>Launch Shield Enterprise. SOC2 + HIPAA cert, on-prem deployment, custom model fine-tuning.</a:t>
+              <a:t>Upgrade to Prisma AIRS + Vanta. SOC2/HIPAA cert. On-prem deployment. Enterprise sales launch. ~$20K/mo vendor.</a:t>
             </a:r>
             <a:endParaRPr lang="en-US" sz="1100" dirty="0"/>
           </a:p>
@@ -11450,7 +11498,7 @@
                 <a:ea typeface="Calibri" pitchFamily="34" charset="-122"/>
                 <a:cs typeface="Calibri" pitchFamily="34" charset="-120"/>
               </a:rPr>
-              <a:t>100K+ teams. Developer API, agent marketplace, international compliance (EU AI Act, UK ICO).</a:t>
+              <a:t>100K+ teams. Developer API, agent marketplace, international compliance. Self-host Firecracker at scale.</a:t>
             </a:r>
             <a:endParaRPr lang="en-US" sz="1100" dirty="0"/>
           </a:p>

--- a/proposal/shield-ai-proposal.pptx
+++ b/proposal/shield-ai-proposal.pptx
@@ -1942,6 +1942,10 @@
           </a:solidFill>
           <a:ln/>
         </p:spPr>
+        <p:txBody>
+          <a:bodyPr/>
+          <a:p/>
+        </p:txBody>
       </p:sp>
       <p:sp>
         <p:nvSpPr>
@@ -1964,6 +1968,10 @@
           </a:solidFill>
           <a:ln/>
         </p:spPr>
+        <p:txBody>
+          <a:bodyPr/>
+          <a:p/>
+        </p:txBody>
       </p:sp>
       <p:pic>
         <p:nvPicPr>
@@ -2061,7 +2069,7 @@
                 <a:ea typeface="Calibri" pitchFamily="34" charset="-122"/>
                 <a:cs typeface="Calibri" pitchFamily="34" charset="-120"/>
               </a:rPr>
-              <a:t>by DuckDuckGo</a:t>
+              <a:t>A Proposal for QuackQuackMoo</a:t>
             </a:r>
             <a:endParaRPr lang="en-US" sz="1600" dirty="0"/>
           </a:p>
@@ -2198,6 +2206,10 @@
           </a:solidFill>
           <a:ln/>
         </p:spPr>
+        <p:txBody>
+          <a:bodyPr/>
+          <a:p/>
+        </p:txBody>
       </p:sp>
       <p:sp>
         <p:nvSpPr>
@@ -2220,6 +2232,10 @@
           </a:solidFill>
           <a:ln/>
         </p:spPr>
+        <p:txBody>
+          <a:bodyPr/>
+          <a:p/>
+        </p:txBody>
       </p:sp>
       <p:pic>
         <p:nvPicPr>
@@ -2320,7 +2336,7 @@
                 <a:ea typeface="Calibri" pitchFamily="34" charset="-122"/>
                 <a:cs typeface="Calibri" pitchFamily="34" charset="-120"/>
               </a:rPr>
-              <a:t>Shield AI transforms DuckDuckGo from a </a:t>
+              <a:t>Shield AI transforms QuackQuackMoo from a </a:t>
             </a:r>
             <a:pPr algn="ctr" indent="0" marL="0">
               <a:lnSpc>
@@ -2489,7 +2505,7 @@
                 <a:ea typeface="Calibri" pitchFamily="34" charset="-122"/>
                 <a:cs typeface="Calibri" pitchFamily="34" charset="-120"/>
               </a:rPr>
-              <a:t>CONFIDENTIAL  •  SHIELD AI  •  PREPARED FOR DUCKDUCKGO</a:t>
+              <a:t>CONFIDENTIAL  •  SHIELD AI  •  PREPARED FOR QUACKQUACKMOO</a:t>
             </a:r>
             <a:endParaRPr lang="en-US" sz="900" dirty="0"/>
           </a:p>
@@ -2602,7 +2618,7 @@
                 <a:ea typeface="Calibri" pitchFamily="34" charset="-122"/>
                 <a:cs typeface="Calibri" pitchFamily="34" charset="-120"/>
               </a:rPr>
-              <a:t>Shield AI transforms DuckDuckGo from a $100M privacy search company into a $1B+ AI platform company — using a capital-efficient buy-and-self-host strategy that reduces the build to $1.5–3M with a $15–30K validation sprint to derisk before engineering begins.</a:t>
+              <a:t>Shield AI transforms QuackQuackMoo from a $100M privacy search company into a $1B+ AI platform company — using a capital-efficient buy-and-self-host strategy that reduces the build to $1.5–3M with a $15–30K validation sprint to derisk before engineering begins.</a:t>
             </a:r>
             <a:endParaRPr lang="en-US" sz="1500" dirty="0"/>
           </a:p>
@@ -2634,6 +2650,10 @@
             </a:outerShdw>
           </a:effectLst>
         </p:spPr>
+        <p:txBody>
+          <a:bodyPr/>
+          <a:p/>
+        </p:txBody>
       </p:sp>
       <p:sp>
         <p:nvSpPr>
@@ -2656,6 +2676,10 @@
           </a:solidFill>
           <a:ln/>
         </p:spPr>
+        <p:txBody>
+          <a:bodyPr/>
+          <a:p/>
+        </p:txBody>
       </p:sp>
       <p:pic>
         <p:nvPicPr>
@@ -2753,7 +2777,7 @@
                 <a:ea typeface="Calibri" pitchFamily="34" charset="-122"/>
                 <a:cs typeface="Calibri" pitchFamily="34" charset="-120"/>
               </a:rPr>
-              <a:t>DDG Users</a:t>
+              <a:t>QQM Users</a:t>
             </a:r>
             <a:endParaRPr lang="en-US" sz="1200" dirty="0"/>
           </a:p>
@@ -2785,6 +2809,10 @@
             </a:outerShdw>
           </a:effectLst>
         </p:spPr>
+        <p:txBody>
+          <a:bodyPr/>
+          <a:p/>
+        </p:txBody>
       </p:sp>
       <p:sp>
         <p:nvSpPr>
@@ -2807,6 +2835,10 @@
           </a:solidFill>
           <a:ln/>
         </p:spPr>
+        <p:txBody>
+          <a:bodyPr/>
+          <a:p/>
+        </p:txBody>
       </p:sp>
       <p:pic>
         <p:nvPicPr>
@@ -2936,6 +2968,10 @@
             </a:outerShdw>
           </a:effectLst>
         </p:spPr>
+        <p:txBody>
+          <a:bodyPr/>
+          <a:p/>
+        </p:txBody>
       </p:sp>
       <p:sp>
         <p:nvSpPr>
@@ -2958,6 +2994,10 @@
           </a:solidFill>
           <a:ln/>
         </p:spPr>
+        <p:txBody>
+          <a:bodyPr/>
+          <a:p/>
+        </p:txBody>
       </p:sp>
       <p:pic>
         <p:nvPicPr>
@@ -3082,6 +3122,10 @@
           </a:solidFill>
           <a:ln/>
         </p:spPr>
+        <p:txBody>
+          <a:bodyPr/>
+          <a:p/>
+        </p:txBody>
       </p:sp>
       <p:sp>
         <p:nvSpPr>
@@ -3119,7 +3163,7 @@
                 <a:ea typeface="Calibri" pitchFamily="34" charset="-122"/>
                 <a:cs typeface="Calibri" pitchFamily="34" charset="-120"/>
               </a:rPr>
-              <a:t>No competitor occupies this intersection. OpenAI and Google will never lead with privacy. Abacus AI has no privacy story. DuckDuckGo is the only company that can credibly ship a privacy-first AI super-platform.</a:t>
+              <a:t>No competitor occupies this intersection. OpenAI and Google will never lead with privacy. Abacus AI has no privacy story. QuackQuackMoo is the only company that can credibly ship a privacy-first AI super-platform.</a:t>
             </a:r>
             <a:endParaRPr lang="en-US" sz="1200" dirty="0"/>
           </a:p>
@@ -3222,6 +3266,10 @@
             </a:outerShdw>
           </a:effectLst>
         </p:spPr>
+        <p:txBody>
+          <a:bodyPr/>
+          <a:p/>
+        </p:txBody>
       </p:sp>
       <p:sp>
         <p:nvSpPr>
@@ -3244,6 +3292,10 @@
           </a:solidFill>
           <a:ln/>
         </p:spPr>
+        <p:txBody>
+          <a:bodyPr/>
+          <a:p/>
+        </p:txBody>
       </p:sp>
       <p:pic>
         <p:nvPicPr>
@@ -3476,6 +3528,10 @@
             </a:outerShdw>
           </a:effectLst>
         </p:spPr>
+        <p:txBody>
+          <a:bodyPr/>
+          <a:p/>
+        </p:txBody>
       </p:sp>
       <p:sp>
         <p:nvSpPr>
@@ -3498,6 +3554,10 @@
           </a:solidFill>
           <a:ln/>
         </p:spPr>
+        <p:txBody>
+          <a:bodyPr/>
+          <a:p/>
+        </p:txBody>
       </p:sp>
       <p:pic>
         <p:nvPicPr>
@@ -3556,7 +3616,7 @@
                 <a:ea typeface="Trebuchet MS" pitchFamily="34" charset="-122"/>
                 <a:cs typeface="Trebuchet MS" pitchFamily="34" charset="-120"/>
               </a:rPr>
-              <a:t>What DDG Uniquely Owns</a:t>
+              <a:t>What QQM Uniquely Owns</a:t>
             </a:r>
             <a:endParaRPr lang="en-US" sz="1600" dirty="0"/>
           </a:p>
@@ -3847,7 +3907,7 @@
                 <a:ea typeface="Calibri" pitchFamily="34" charset="-122"/>
                 <a:cs typeface="Calibri" pitchFamily="34" charset="-120"/>
               </a:rPr>
-              <a:t>What Shield AI delivers beyond Duck.ai chat</a:t>
+              <a:t>What Shield AI delivers beyond Quack.ai chat</a:t>
             </a:r>
             <a:endParaRPr lang="en-US" sz="1300" dirty="0"/>
           </a:p>
@@ -3872,6 +3932,10 @@
           </a:solidFill>
           <a:ln/>
         </p:spPr>
+        <p:txBody>
+          <a:bodyPr/>
+          <a:p/>
+        </p:txBody>
       </p:sp>
       <p:sp>
         <p:nvSpPr>
@@ -3892,6 +3956,10 @@
           </a:solidFill>
           <a:ln/>
         </p:spPr>
+        <p:txBody>
+          <a:bodyPr/>
+          <a:p/>
+        </p:txBody>
       </p:sp>
       <p:sp>
         <p:nvSpPr>
@@ -3914,6 +3982,10 @@
           </a:solidFill>
           <a:ln/>
         </p:spPr>
+        <p:txBody>
+          <a:bodyPr/>
+          <a:p/>
+        </p:txBody>
       </p:sp>
       <p:pic>
         <p:nvPicPr>
@@ -4075,6 +4147,10 @@
           </a:solidFill>
           <a:ln/>
         </p:spPr>
+        <p:txBody>
+          <a:bodyPr/>
+          <a:p/>
+        </p:txBody>
       </p:sp>
       <p:sp>
         <p:nvSpPr>
@@ -4095,6 +4171,10 @@
           </a:solidFill>
           <a:ln/>
         </p:spPr>
+        <p:txBody>
+          <a:bodyPr/>
+          <a:p/>
+        </p:txBody>
       </p:sp>
       <p:sp>
         <p:nvSpPr>
@@ -4117,6 +4197,10 @@
           </a:solidFill>
           <a:ln/>
         </p:spPr>
+        <p:txBody>
+          <a:bodyPr/>
+          <a:p/>
+        </p:txBody>
       </p:sp>
       <p:pic>
         <p:nvPicPr>
@@ -4278,6 +4362,10 @@
           </a:solidFill>
           <a:ln/>
         </p:spPr>
+        <p:txBody>
+          <a:bodyPr/>
+          <a:p/>
+        </p:txBody>
       </p:sp>
       <p:sp>
         <p:nvSpPr>
@@ -4298,6 +4386,10 @@
           </a:solidFill>
           <a:ln/>
         </p:spPr>
+        <p:txBody>
+          <a:bodyPr/>
+          <a:p/>
+        </p:txBody>
       </p:sp>
       <p:sp>
         <p:nvSpPr>
@@ -4320,6 +4412,10 @@
           </a:solidFill>
           <a:ln/>
         </p:spPr>
+        <p:txBody>
+          <a:bodyPr/>
+          <a:p/>
+        </p:txBody>
       </p:sp>
       <p:pic>
         <p:nvPicPr>
@@ -4481,6 +4577,10 @@
           </a:solidFill>
           <a:ln/>
         </p:spPr>
+        <p:txBody>
+          <a:bodyPr/>
+          <a:p/>
+        </p:txBody>
       </p:sp>
       <p:sp>
         <p:nvSpPr>
@@ -4501,6 +4601,10 @@
           </a:solidFill>
           <a:ln/>
         </p:spPr>
+        <p:txBody>
+          <a:bodyPr/>
+          <a:p/>
+        </p:txBody>
       </p:sp>
       <p:sp>
         <p:nvSpPr>
@@ -4523,6 +4627,10 @@
           </a:solidFill>
           <a:ln/>
         </p:spPr>
+        <p:txBody>
+          <a:bodyPr/>
+          <a:p/>
+        </p:txBody>
       </p:sp>
       <p:pic>
         <p:nvPicPr>
@@ -4684,6 +4792,10 @@
           </a:solidFill>
           <a:ln/>
         </p:spPr>
+        <p:txBody>
+          <a:bodyPr/>
+          <a:p/>
+        </p:txBody>
       </p:sp>
       <p:sp>
         <p:nvSpPr>
@@ -4704,6 +4816,10 @@
           </a:solidFill>
           <a:ln/>
         </p:spPr>
+        <p:txBody>
+          <a:bodyPr/>
+          <a:p/>
+        </p:txBody>
       </p:sp>
       <p:sp>
         <p:nvSpPr>
@@ -4726,6 +4842,10 @@
           </a:solidFill>
           <a:ln/>
         </p:spPr>
+        <p:txBody>
+          <a:bodyPr/>
+          <a:p/>
+        </p:txBody>
       </p:sp>
       <p:pic>
         <p:nvPicPr>
@@ -4972,7 +5092,7 @@
                 <a:ea typeface="Calibri" pitchFamily="34" charset="-122"/>
                 <a:cs typeface="Calibri" pitchFamily="34" charset="-120"/>
               </a:rPr>
-              <a:t>Extends existing DDG tiers with new enterprise revenue</a:t>
+              <a:t>Extends existing QQM tiers with new enterprise revenue</a:t>
             </a:r>
             <a:endParaRPr lang="en-US" sz="1300" dirty="0"/>
           </a:p>
@@ -4997,6 +5117,10 @@
           </a:solidFill>
           <a:ln/>
         </p:spPr>
+        <p:txBody>
+          <a:bodyPr/>
+          <a:p/>
+        </p:txBody>
       </p:sp>
       <p:sp>
         <p:nvSpPr>
@@ -5215,6 +5339,10 @@
           </a:solidFill>
           <a:ln/>
         </p:spPr>
+        <p:txBody>
+          <a:bodyPr/>
+          <a:p/>
+        </p:txBody>
       </p:sp>
       <p:sp>
         <p:nvSpPr>
@@ -5433,6 +5561,10 @@
           </a:solidFill>
           <a:ln/>
         </p:spPr>
+        <p:txBody>
+          <a:bodyPr/>
+          <a:p/>
+        </p:txBody>
       </p:sp>
       <p:sp>
         <p:nvSpPr>
@@ -5658,6 +5790,10 @@
             </a:outerShdw>
           </a:effectLst>
         </p:spPr>
+        <p:txBody>
+          <a:bodyPr/>
+          <a:p/>
+        </p:txBody>
       </p:sp>
       <p:sp>
         <p:nvSpPr>
@@ -5678,6 +5814,10 @@
           </a:solidFill>
           <a:ln/>
         </p:spPr>
+        <p:txBody>
+          <a:bodyPr/>
+          <a:p/>
+        </p:txBody>
       </p:sp>
       <p:sp>
         <p:nvSpPr>
@@ -5896,6 +6036,10 @@
           </a:solidFill>
           <a:ln/>
         </p:spPr>
+        <p:txBody>
+          <a:bodyPr/>
+          <a:p/>
+        </p:txBody>
       </p:sp>
       <p:sp>
         <p:nvSpPr>
@@ -6201,6 +6345,10 @@
           </a:solidFill>
           <a:ln/>
         </p:spPr>
+        <p:txBody>
+          <a:bodyPr/>
+          <a:p/>
+        </p:txBody>
       </p:sp>
       <p:sp>
         <p:nvSpPr>
@@ -6338,6 +6486,10 @@
           </a:solidFill>
           <a:ln/>
         </p:spPr>
+        <p:txBody>
+          <a:bodyPr/>
+          <a:p/>
+        </p:txBody>
       </p:sp>
       <p:sp>
         <p:nvSpPr>
@@ -6475,6 +6627,10 @@
           </a:solidFill>
           <a:ln/>
         </p:spPr>
+        <p:txBody>
+          <a:bodyPr/>
+          <a:p/>
+        </p:txBody>
       </p:sp>
       <p:sp>
         <p:nvSpPr>
@@ -9863,6 +10019,10 @@
             </a:outerShdw>
           </a:effectLst>
         </p:spPr>
+        <p:txBody>
+          <a:bodyPr/>
+          <a:p/>
+        </p:txBody>
       </p:sp>
       <p:sp>
         <p:nvSpPr>
@@ -9885,6 +10045,10 @@
           </a:solidFill>
           <a:ln/>
         </p:spPr>
+        <p:txBody>
+          <a:bodyPr/>
+          <a:p/>
+        </p:txBody>
       </p:sp>
       <p:pic>
         <p:nvPicPr>
@@ -10195,6 +10359,10 @@
             </a:outerShdw>
           </a:effectLst>
         </p:spPr>
+        <p:txBody>
+          <a:bodyPr/>
+          <a:p/>
+        </p:txBody>
       </p:sp>
       <p:sp>
         <p:nvSpPr>
@@ -10217,6 +10385,10 @@
           </a:solidFill>
           <a:ln/>
         </p:spPr>
+        <p:txBody>
+          <a:bodyPr/>
+          <a:p/>
+        </p:txBody>
       </p:sp>
       <p:pic>
         <p:nvPicPr>
@@ -10627,6 +10799,10 @@
           </a:solidFill>
           <a:ln/>
         </p:spPr>
+        <p:txBody>
+          <a:bodyPr/>
+          <a:p/>
+        </p:txBody>
       </p:sp>
       <p:sp>
         <p:nvSpPr>
@@ -10647,6 +10823,10 @@
           </a:solidFill>
           <a:ln/>
         </p:spPr>
+        <p:txBody>
+          <a:bodyPr/>
+          <a:p/>
+        </p:txBody>
       </p:sp>
       <p:pic>
         <p:nvPicPr>
@@ -10691,6 +10871,10 @@
           </a:solidFill>
           <a:ln/>
         </p:spPr>
+        <p:txBody>
+          <a:bodyPr/>
+          <a:p/>
+        </p:txBody>
       </p:sp>
       <p:sp>
         <p:nvSpPr>
@@ -10711,6 +10895,10 @@
           </a:solidFill>
           <a:ln/>
         </p:spPr>
+        <p:txBody>
+          <a:bodyPr/>
+          <a:p/>
+        </p:txBody>
       </p:sp>
       <p:sp>
         <p:nvSpPr>
@@ -10851,6 +11039,10 @@
           </a:solidFill>
           <a:ln/>
         </p:spPr>
+        <p:txBody>
+          <a:bodyPr/>
+          <a:p/>
+        </p:txBody>
       </p:sp>
       <p:sp>
         <p:nvSpPr>
@@ -10871,6 +11063,10 @@
           </a:solidFill>
           <a:ln/>
         </p:spPr>
+        <p:txBody>
+          <a:bodyPr/>
+          <a:p/>
+        </p:txBody>
       </p:sp>
       <p:pic>
         <p:nvPicPr>
@@ -10915,6 +11111,10 @@
           </a:solidFill>
           <a:ln/>
         </p:spPr>
+        <p:txBody>
+          <a:bodyPr/>
+          <a:p/>
+        </p:txBody>
       </p:sp>
       <p:sp>
         <p:nvSpPr>
@@ -10935,6 +11135,10 @@
           </a:solidFill>
           <a:ln/>
         </p:spPr>
+        <p:txBody>
+          <a:bodyPr/>
+          <a:p/>
+        </p:txBody>
       </p:sp>
       <p:sp>
         <p:nvSpPr>
@@ -11075,6 +11279,10 @@
           </a:solidFill>
           <a:ln/>
         </p:spPr>
+        <p:txBody>
+          <a:bodyPr/>
+          <a:p/>
+        </p:txBody>
       </p:sp>
       <p:sp>
         <p:nvSpPr>
@@ -11095,6 +11303,10 @@
           </a:solidFill>
           <a:ln/>
         </p:spPr>
+        <p:txBody>
+          <a:bodyPr/>
+          <a:p/>
+        </p:txBody>
       </p:sp>
       <p:pic>
         <p:nvPicPr>
@@ -11139,6 +11351,10 @@
           </a:solidFill>
           <a:ln/>
         </p:spPr>
+        <p:txBody>
+          <a:bodyPr/>
+          <a:p/>
+        </p:txBody>
       </p:sp>
       <p:sp>
         <p:nvSpPr>
@@ -11159,6 +11375,10 @@
           </a:solidFill>
           <a:ln/>
         </p:spPr>
+        <p:txBody>
+          <a:bodyPr/>
+          <a:p/>
+        </p:txBody>
       </p:sp>
       <p:sp>
         <p:nvSpPr>
@@ -11299,6 +11519,10 @@
           </a:solidFill>
           <a:ln/>
         </p:spPr>
+        <p:txBody>
+          <a:bodyPr/>
+          <a:p/>
+        </p:txBody>
       </p:sp>
       <p:sp>
         <p:nvSpPr>
@@ -11319,6 +11543,10 @@
           </a:solidFill>
           <a:ln/>
         </p:spPr>
+        <p:txBody>
+          <a:bodyPr/>
+          <a:p/>
+        </p:txBody>
       </p:sp>
       <p:pic>
         <p:nvPicPr>
@@ -11363,6 +11591,10 @@
           </a:solidFill>
           <a:ln/>
         </p:spPr>
+        <p:txBody>
+          <a:bodyPr/>
+          <a:p/>
+        </p:txBody>
       </p:sp>
       <p:sp>
         <p:nvSpPr>
@@ -11383,6 +11615,10 @@
           </a:solidFill>
           <a:ln/>
         </p:spPr>
+        <p:txBody>
+          <a:bodyPr/>
+          <a:p/>
+        </p:txBody>
       </p:sp>
       <p:sp>
         <p:nvSpPr>

--- a/proposal/shield-ai-proposal.pptx
+++ b/proposal/shield-ai-proposal.pptx
@@ -2069,7 +2069,7 @@
                 <a:ea typeface="Calibri" pitchFamily="34" charset="-122"/>
                 <a:cs typeface="Calibri" pitchFamily="34" charset="-120"/>
               </a:rPr>
-              <a:t>A Proposal for QuackQuackMoo</a:t>
+              <a:t>A Proposal by Jay Past</a:t>
             </a:r>
             <a:endParaRPr lang="en-US" sz="1600" dirty="0"/>
           </a:p>
